--- a/testcases/transitions.pptx
+++ b/testcases/transitions.pptx
@@ -141,7 +141,7 @@
           <p:cNvPr id="2" name="标题 1">
             <a:extLst>
               <a:ext uri="{FF2B5EF4-FFF2-40B4-BE49-F238E27FC236}">
-                <a16:creationId xmlns:a16="http://schemas.microsoft.com/office/drawing/2014/main" id="{118D6BDB-B713-0EB3-AD0B-47B48C83AC01}"/>
+                <a16:creationId xmlns:a16="http://schemas.microsoft.com/office/drawing/2014/main" id="{EB1FCF47-85F5-A18A-48F2-8EDF3D2FA003}"/>
               </a:ext>
             </a:extLst>
           </p:cNvPr>
@@ -178,7 +178,7 @@
           <p:cNvPr id="3" name="副标题 2">
             <a:extLst>
               <a:ext uri="{FF2B5EF4-FFF2-40B4-BE49-F238E27FC236}">
-                <a16:creationId xmlns:a16="http://schemas.microsoft.com/office/drawing/2014/main" id="{26A79859-8A42-BC9F-B586-97DE03CBFEDB}"/>
+                <a16:creationId xmlns:a16="http://schemas.microsoft.com/office/drawing/2014/main" id="{D975B2A3-5095-DB26-0347-9AE10ABC9CE2}"/>
               </a:ext>
             </a:extLst>
           </p:cNvPr>
@@ -248,7 +248,7 @@
           <p:cNvPr id="4" name="日期占位符 3">
             <a:extLst>
               <a:ext uri="{FF2B5EF4-FFF2-40B4-BE49-F238E27FC236}">
-                <a16:creationId xmlns:a16="http://schemas.microsoft.com/office/drawing/2014/main" id="{455D2F27-14EF-81BE-BBB4-33A9827FC67A}"/>
+                <a16:creationId xmlns:a16="http://schemas.microsoft.com/office/drawing/2014/main" id="{FB42A1C8-DA22-05FD-D94E-A10DC25A3DEF}"/>
               </a:ext>
             </a:extLst>
           </p:cNvPr>
@@ -264,7 +264,7 @@
           <a:bodyPr/>
           <a:lstStyle/>
           <a:p>
-            <a:fld id="{243F0BD1-94EA-4D63-A2F5-5BFFEE810A19}" type="datetimeFigureOut">
+            <a:fld id="{E55F9051-2566-4200-B860-7E1F8C663F4B}" type="datetimeFigureOut">
               <a:rPr lang="zh-CN" altLang="en-US" smtClean="0"/>
               <a:t>2026/10/13</a:t>
             </a:fld>
@@ -277,7 +277,7 @@
           <p:cNvPr id="5" name="页脚占位符 4">
             <a:extLst>
               <a:ext uri="{FF2B5EF4-FFF2-40B4-BE49-F238E27FC236}">
-                <a16:creationId xmlns:a16="http://schemas.microsoft.com/office/drawing/2014/main" id="{5F4D900A-625E-4D58-4A72-3DD93B3471BB}"/>
+                <a16:creationId xmlns:a16="http://schemas.microsoft.com/office/drawing/2014/main" id="{21548597-DBA3-D5B6-BA02-DAE1B9E1F97F}"/>
               </a:ext>
             </a:extLst>
           </p:cNvPr>
@@ -302,7 +302,7 @@
           <p:cNvPr id="6" name="灯片编号占位符 5">
             <a:extLst>
               <a:ext uri="{FF2B5EF4-FFF2-40B4-BE49-F238E27FC236}">
-                <a16:creationId xmlns:a16="http://schemas.microsoft.com/office/drawing/2014/main" id="{7C4339BE-520E-7A33-A536-853F8062E3DE}"/>
+                <a16:creationId xmlns:a16="http://schemas.microsoft.com/office/drawing/2014/main" id="{AFD07EB4-7F90-893C-C11F-32EDEBCDD7BC}"/>
               </a:ext>
             </a:extLst>
           </p:cNvPr>
@@ -318,7 +318,7 @@
           <a:bodyPr/>
           <a:lstStyle/>
           <a:p>
-            <a:fld id="{6B9EDC62-10D3-457F-B9DD-3F915346C1FF}" type="slidenum">
+            <a:fld id="{8DFCF1E8-F400-4BDF-90B2-B82CEEA72621}" type="slidenum">
               <a:rPr lang="zh-CN" altLang="en-US" smtClean="0"/>
               <a:t>‹#›</a:t>
             </a:fld>
@@ -329,7 +329,7 @@
     </p:spTree>
     <p:extLst>
       <p:ext uri="{BB962C8B-B14F-4D97-AF65-F5344CB8AC3E}">
-        <p14:creationId xmlns:p14="http://schemas.microsoft.com/office/powerpoint/2010/main" val="856774326"/>
+        <p14:creationId xmlns:p14="http://schemas.microsoft.com/office/powerpoint/2010/main" val="2405994587"/>
       </p:ext>
     </p:extLst>
   </p:cSld>
@@ -361,7 +361,7 @@
           <p:cNvPr id="2" name="标题 1">
             <a:extLst>
               <a:ext uri="{FF2B5EF4-FFF2-40B4-BE49-F238E27FC236}">
-                <a16:creationId xmlns:a16="http://schemas.microsoft.com/office/drawing/2014/main" id="{294C93C3-C6BF-14BE-F17E-E3C2DB2B8462}"/>
+                <a16:creationId xmlns:a16="http://schemas.microsoft.com/office/drawing/2014/main" id="{76956005-60FA-4784-BA04-046B0DB27CF9}"/>
               </a:ext>
             </a:extLst>
           </p:cNvPr>
@@ -389,7 +389,7 @@
           <p:cNvPr id="3" name="竖排文字占位符 2">
             <a:extLst>
               <a:ext uri="{FF2B5EF4-FFF2-40B4-BE49-F238E27FC236}">
-                <a16:creationId xmlns:a16="http://schemas.microsoft.com/office/drawing/2014/main" id="{21693643-9D24-7C48-5036-EAF79F425BD2}"/>
+                <a16:creationId xmlns:a16="http://schemas.microsoft.com/office/drawing/2014/main" id="{FE3D175B-4C5B-1CE9-26AB-27DA52F5AB64}"/>
               </a:ext>
             </a:extLst>
           </p:cNvPr>
@@ -446,7 +446,7 @@
           <p:cNvPr id="4" name="日期占位符 3">
             <a:extLst>
               <a:ext uri="{FF2B5EF4-FFF2-40B4-BE49-F238E27FC236}">
-                <a16:creationId xmlns:a16="http://schemas.microsoft.com/office/drawing/2014/main" id="{80F27A21-250B-A176-ACCE-84B977A0AD25}"/>
+                <a16:creationId xmlns:a16="http://schemas.microsoft.com/office/drawing/2014/main" id="{BAB7E062-EEC0-A03D-2197-A4C1212A3149}"/>
               </a:ext>
             </a:extLst>
           </p:cNvPr>
@@ -462,7 +462,7 @@
           <a:bodyPr/>
           <a:lstStyle/>
           <a:p>
-            <a:fld id="{243F0BD1-94EA-4D63-A2F5-5BFFEE810A19}" type="datetimeFigureOut">
+            <a:fld id="{E55F9051-2566-4200-B860-7E1F8C663F4B}" type="datetimeFigureOut">
               <a:rPr lang="zh-CN" altLang="en-US" smtClean="0"/>
               <a:t>2026/10/13</a:t>
             </a:fld>
@@ -475,7 +475,7 @@
           <p:cNvPr id="5" name="页脚占位符 4">
             <a:extLst>
               <a:ext uri="{FF2B5EF4-FFF2-40B4-BE49-F238E27FC236}">
-                <a16:creationId xmlns:a16="http://schemas.microsoft.com/office/drawing/2014/main" id="{091EC410-6995-1F9A-819D-CB9176D3DEAA}"/>
+                <a16:creationId xmlns:a16="http://schemas.microsoft.com/office/drawing/2014/main" id="{A93B59AD-9C33-97B3-CCB6-D679664A5394}"/>
               </a:ext>
             </a:extLst>
           </p:cNvPr>
@@ -500,7 +500,7 @@
           <p:cNvPr id="6" name="灯片编号占位符 5">
             <a:extLst>
               <a:ext uri="{FF2B5EF4-FFF2-40B4-BE49-F238E27FC236}">
-                <a16:creationId xmlns:a16="http://schemas.microsoft.com/office/drawing/2014/main" id="{B3FDEBAD-2201-33F8-1DD7-60B861636E89}"/>
+                <a16:creationId xmlns:a16="http://schemas.microsoft.com/office/drawing/2014/main" id="{4DB9E7C7-5463-4EE7-0549-6C8A2F69D547}"/>
               </a:ext>
             </a:extLst>
           </p:cNvPr>
@@ -516,7 +516,7 @@
           <a:bodyPr/>
           <a:lstStyle/>
           <a:p>
-            <a:fld id="{6B9EDC62-10D3-457F-B9DD-3F915346C1FF}" type="slidenum">
+            <a:fld id="{8DFCF1E8-F400-4BDF-90B2-B82CEEA72621}" type="slidenum">
               <a:rPr lang="zh-CN" altLang="en-US" smtClean="0"/>
               <a:t>‹#›</a:t>
             </a:fld>
@@ -527,7 +527,7 @@
     </p:spTree>
     <p:extLst>
       <p:ext uri="{BB962C8B-B14F-4D97-AF65-F5344CB8AC3E}">
-        <p14:creationId xmlns:p14="http://schemas.microsoft.com/office/powerpoint/2010/main" val="1841122682"/>
+        <p14:creationId xmlns:p14="http://schemas.microsoft.com/office/powerpoint/2010/main" val="965382822"/>
       </p:ext>
     </p:extLst>
   </p:cSld>
@@ -559,7 +559,7 @@
           <p:cNvPr id="2" name="竖排标题 1">
             <a:extLst>
               <a:ext uri="{FF2B5EF4-FFF2-40B4-BE49-F238E27FC236}">
-                <a16:creationId xmlns:a16="http://schemas.microsoft.com/office/drawing/2014/main" id="{4D7A9BE4-FE33-0588-EE1F-455370EAD5D5}"/>
+                <a16:creationId xmlns:a16="http://schemas.microsoft.com/office/drawing/2014/main" id="{EE052D26-EBD0-67A3-0A5D-DA3A15DEE113}"/>
               </a:ext>
             </a:extLst>
           </p:cNvPr>
@@ -592,7 +592,7 @@
           <p:cNvPr id="3" name="竖排文字占位符 2">
             <a:extLst>
               <a:ext uri="{FF2B5EF4-FFF2-40B4-BE49-F238E27FC236}">
-                <a16:creationId xmlns:a16="http://schemas.microsoft.com/office/drawing/2014/main" id="{761DC9B8-F7DC-D26F-4366-AD708A8629A3}"/>
+                <a16:creationId xmlns:a16="http://schemas.microsoft.com/office/drawing/2014/main" id="{0DF5CC24-90BF-ACB7-19E5-CE41B9B3E269}"/>
               </a:ext>
             </a:extLst>
           </p:cNvPr>
@@ -654,7 +654,7 @@
           <p:cNvPr id="4" name="日期占位符 3">
             <a:extLst>
               <a:ext uri="{FF2B5EF4-FFF2-40B4-BE49-F238E27FC236}">
-                <a16:creationId xmlns:a16="http://schemas.microsoft.com/office/drawing/2014/main" id="{78F653E8-DC20-458B-B6FA-7EF389E2D292}"/>
+                <a16:creationId xmlns:a16="http://schemas.microsoft.com/office/drawing/2014/main" id="{15FFF887-4645-87ED-9384-C76E44B9A650}"/>
               </a:ext>
             </a:extLst>
           </p:cNvPr>
@@ -670,7 +670,7 @@
           <a:bodyPr/>
           <a:lstStyle/>
           <a:p>
-            <a:fld id="{243F0BD1-94EA-4D63-A2F5-5BFFEE810A19}" type="datetimeFigureOut">
+            <a:fld id="{E55F9051-2566-4200-B860-7E1F8C663F4B}" type="datetimeFigureOut">
               <a:rPr lang="zh-CN" altLang="en-US" smtClean="0"/>
               <a:t>2026/10/13</a:t>
             </a:fld>
@@ -683,7 +683,7 @@
           <p:cNvPr id="5" name="页脚占位符 4">
             <a:extLst>
               <a:ext uri="{FF2B5EF4-FFF2-40B4-BE49-F238E27FC236}">
-                <a16:creationId xmlns:a16="http://schemas.microsoft.com/office/drawing/2014/main" id="{217231E5-0B33-BB1C-F4B8-9F52C391F8B7}"/>
+                <a16:creationId xmlns:a16="http://schemas.microsoft.com/office/drawing/2014/main" id="{739EBACC-6411-0D36-E144-9330F38E2901}"/>
               </a:ext>
             </a:extLst>
           </p:cNvPr>
@@ -708,7 +708,7 @@
           <p:cNvPr id="6" name="灯片编号占位符 5">
             <a:extLst>
               <a:ext uri="{FF2B5EF4-FFF2-40B4-BE49-F238E27FC236}">
-                <a16:creationId xmlns:a16="http://schemas.microsoft.com/office/drawing/2014/main" id="{AF3CE0F8-73E4-005C-5FB3-1B27557EE443}"/>
+                <a16:creationId xmlns:a16="http://schemas.microsoft.com/office/drawing/2014/main" id="{42B66CF3-46AC-EF5A-F155-9F5D584AEC37}"/>
               </a:ext>
             </a:extLst>
           </p:cNvPr>
@@ -724,7 +724,7 @@
           <a:bodyPr/>
           <a:lstStyle/>
           <a:p>
-            <a:fld id="{6B9EDC62-10D3-457F-B9DD-3F915346C1FF}" type="slidenum">
+            <a:fld id="{8DFCF1E8-F400-4BDF-90B2-B82CEEA72621}" type="slidenum">
               <a:rPr lang="zh-CN" altLang="en-US" smtClean="0"/>
               <a:t>‹#›</a:t>
             </a:fld>
@@ -735,7 +735,7 @@
     </p:spTree>
     <p:extLst>
       <p:ext uri="{BB962C8B-B14F-4D97-AF65-F5344CB8AC3E}">
-        <p14:creationId xmlns:p14="http://schemas.microsoft.com/office/powerpoint/2010/main" val="3156479185"/>
+        <p14:creationId xmlns:p14="http://schemas.microsoft.com/office/powerpoint/2010/main" val="1917795066"/>
       </p:ext>
     </p:extLst>
   </p:cSld>
@@ -767,7 +767,7 @@
           <p:cNvPr id="2" name="标题 1">
             <a:extLst>
               <a:ext uri="{FF2B5EF4-FFF2-40B4-BE49-F238E27FC236}">
-                <a16:creationId xmlns:a16="http://schemas.microsoft.com/office/drawing/2014/main" id="{FC0A327C-E144-3A53-FFED-9D2CF24B7EBE}"/>
+                <a16:creationId xmlns:a16="http://schemas.microsoft.com/office/drawing/2014/main" id="{5BEB1702-1439-6EF8-1070-D215C3418C53}"/>
               </a:ext>
             </a:extLst>
           </p:cNvPr>
@@ -795,7 +795,7 @@
           <p:cNvPr id="3" name="内容占位符 2">
             <a:extLst>
               <a:ext uri="{FF2B5EF4-FFF2-40B4-BE49-F238E27FC236}">
-                <a16:creationId xmlns:a16="http://schemas.microsoft.com/office/drawing/2014/main" id="{A7380689-D077-6F20-92F4-7A7FEA009946}"/>
+                <a16:creationId xmlns:a16="http://schemas.microsoft.com/office/drawing/2014/main" id="{72818B33-A460-1665-5922-960E5136C69D}"/>
               </a:ext>
             </a:extLst>
           </p:cNvPr>
@@ -852,7 +852,7 @@
           <p:cNvPr id="4" name="日期占位符 3">
             <a:extLst>
               <a:ext uri="{FF2B5EF4-FFF2-40B4-BE49-F238E27FC236}">
-                <a16:creationId xmlns:a16="http://schemas.microsoft.com/office/drawing/2014/main" id="{BC28F71B-5C2D-DAC8-404D-0D56D5B76D5F}"/>
+                <a16:creationId xmlns:a16="http://schemas.microsoft.com/office/drawing/2014/main" id="{E66FBAF3-A1B0-FC04-2138-C9E4F5E5DB73}"/>
               </a:ext>
             </a:extLst>
           </p:cNvPr>
@@ -868,7 +868,7 @@
           <a:bodyPr/>
           <a:lstStyle/>
           <a:p>
-            <a:fld id="{243F0BD1-94EA-4D63-A2F5-5BFFEE810A19}" type="datetimeFigureOut">
+            <a:fld id="{E55F9051-2566-4200-B860-7E1F8C663F4B}" type="datetimeFigureOut">
               <a:rPr lang="zh-CN" altLang="en-US" smtClean="0"/>
               <a:t>2026/10/13</a:t>
             </a:fld>
@@ -881,7 +881,7 @@
           <p:cNvPr id="5" name="页脚占位符 4">
             <a:extLst>
               <a:ext uri="{FF2B5EF4-FFF2-40B4-BE49-F238E27FC236}">
-                <a16:creationId xmlns:a16="http://schemas.microsoft.com/office/drawing/2014/main" id="{89CB2320-395E-04EC-06C1-D11A9D89A62E}"/>
+                <a16:creationId xmlns:a16="http://schemas.microsoft.com/office/drawing/2014/main" id="{44CABA14-635D-08DC-0BD7-4DFF17BAB076}"/>
               </a:ext>
             </a:extLst>
           </p:cNvPr>
@@ -906,7 +906,7 @@
           <p:cNvPr id="6" name="灯片编号占位符 5">
             <a:extLst>
               <a:ext uri="{FF2B5EF4-FFF2-40B4-BE49-F238E27FC236}">
-                <a16:creationId xmlns:a16="http://schemas.microsoft.com/office/drawing/2014/main" id="{B09C9543-5925-A1C9-5D0C-21649B1C546A}"/>
+                <a16:creationId xmlns:a16="http://schemas.microsoft.com/office/drawing/2014/main" id="{72AF1206-4F71-088F-7E1E-66D30C3B18D4}"/>
               </a:ext>
             </a:extLst>
           </p:cNvPr>
@@ -922,7 +922,7 @@
           <a:bodyPr/>
           <a:lstStyle/>
           <a:p>
-            <a:fld id="{6B9EDC62-10D3-457F-B9DD-3F915346C1FF}" type="slidenum">
+            <a:fld id="{8DFCF1E8-F400-4BDF-90B2-B82CEEA72621}" type="slidenum">
               <a:rPr lang="zh-CN" altLang="en-US" smtClean="0"/>
               <a:t>‹#›</a:t>
             </a:fld>
@@ -933,7 +933,7 @@
     </p:spTree>
     <p:extLst>
       <p:ext uri="{BB962C8B-B14F-4D97-AF65-F5344CB8AC3E}">
-        <p14:creationId xmlns:p14="http://schemas.microsoft.com/office/powerpoint/2010/main" val="2084718112"/>
+        <p14:creationId xmlns:p14="http://schemas.microsoft.com/office/powerpoint/2010/main" val="4001924565"/>
       </p:ext>
     </p:extLst>
   </p:cSld>
@@ -965,7 +965,7 @@
           <p:cNvPr id="2" name="标题 1">
             <a:extLst>
               <a:ext uri="{FF2B5EF4-FFF2-40B4-BE49-F238E27FC236}">
-                <a16:creationId xmlns:a16="http://schemas.microsoft.com/office/drawing/2014/main" id="{49A4AB90-1A29-5E41-4A9C-60A825629F03}"/>
+                <a16:creationId xmlns:a16="http://schemas.microsoft.com/office/drawing/2014/main" id="{E63D3E8A-B6D3-66EB-5DB0-355E251F0E89}"/>
               </a:ext>
             </a:extLst>
           </p:cNvPr>
@@ -1002,7 +1002,7 @@
           <p:cNvPr id="3" name="文本占位符 2">
             <a:extLst>
               <a:ext uri="{FF2B5EF4-FFF2-40B4-BE49-F238E27FC236}">
-                <a16:creationId xmlns:a16="http://schemas.microsoft.com/office/drawing/2014/main" id="{8AFF49D6-3B56-DCB5-F004-2D6AED219A55}"/>
+                <a16:creationId xmlns:a16="http://schemas.microsoft.com/office/drawing/2014/main" id="{55E4FF17-A18B-D0E4-DA64-249C5BCD9BC2}"/>
               </a:ext>
             </a:extLst>
           </p:cNvPr>
@@ -1127,7 +1127,7 @@
           <p:cNvPr id="4" name="日期占位符 3">
             <a:extLst>
               <a:ext uri="{FF2B5EF4-FFF2-40B4-BE49-F238E27FC236}">
-                <a16:creationId xmlns:a16="http://schemas.microsoft.com/office/drawing/2014/main" id="{2CD8EFA1-7BDF-6013-E2B5-71E342E05122}"/>
+                <a16:creationId xmlns:a16="http://schemas.microsoft.com/office/drawing/2014/main" id="{1EC14D63-7FF7-FEF1-C1D1-6916FA4D3868}"/>
               </a:ext>
             </a:extLst>
           </p:cNvPr>
@@ -1143,7 +1143,7 @@
           <a:bodyPr/>
           <a:lstStyle/>
           <a:p>
-            <a:fld id="{243F0BD1-94EA-4D63-A2F5-5BFFEE810A19}" type="datetimeFigureOut">
+            <a:fld id="{E55F9051-2566-4200-B860-7E1F8C663F4B}" type="datetimeFigureOut">
               <a:rPr lang="zh-CN" altLang="en-US" smtClean="0"/>
               <a:t>2026/10/13</a:t>
             </a:fld>
@@ -1156,7 +1156,7 @@
           <p:cNvPr id="5" name="页脚占位符 4">
             <a:extLst>
               <a:ext uri="{FF2B5EF4-FFF2-40B4-BE49-F238E27FC236}">
-                <a16:creationId xmlns:a16="http://schemas.microsoft.com/office/drawing/2014/main" id="{FF301C0D-CC9B-69AA-83EC-97081DF755BE}"/>
+                <a16:creationId xmlns:a16="http://schemas.microsoft.com/office/drawing/2014/main" id="{645F8F08-5E11-EBE5-F7DC-3C5F395E34CA}"/>
               </a:ext>
             </a:extLst>
           </p:cNvPr>
@@ -1181,7 +1181,7 @@
           <p:cNvPr id="6" name="灯片编号占位符 5">
             <a:extLst>
               <a:ext uri="{FF2B5EF4-FFF2-40B4-BE49-F238E27FC236}">
-                <a16:creationId xmlns:a16="http://schemas.microsoft.com/office/drawing/2014/main" id="{46A67D4A-F6FD-0E1B-4714-5CC0288FC0BC}"/>
+                <a16:creationId xmlns:a16="http://schemas.microsoft.com/office/drawing/2014/main" id="{1F4D8B25-A9F8-1E55-D5A0-4AEA7DE83BCB}"/>
               </a:ext>
             </a:extLst>
           </p:cNvPr>
@@ -1197,7 +1197,7 @@
           <a:bodyPr/>
           <a:lstStyle/>
           <a:p>
-            <a:fld id="{6B9EDC62-10D3-457F-B9DD-3F915346C1FF}" type="slidenum">
+            <a:fld id="{8DFCF1E8-F400-4BDF-90B2-B82CEEA72621}" type="slidenum">
               <a:rPr lang="zh-CN" altLang="en-US" smtClean="0"/>
               <a:t>‹#›</a:t>
             </a:fld>
@@ -1208,7 +1208,7 @@
     </p:spTree>
     <p:extLst>
       <p:ext uri="{BB962C8B-B14F-4D97-AF65-F5344CB8AC3E}">
-        <p14:creationId xmlns:p14="http://schemas.microsoft.com/office/powerpoint/2010/main" val="3902212487"/>
+        <p14:creationId xmlns:p14="http://schemas.microsoft.com/office/powerpoint/2010/main" val="3454837305"/>
       </p:ext>
     </p:extLst>
   </p:cSld>
@@ -1240,7 +1240,7 @@
           <p:cNvPr id="2" name="标题 1">
             <a:extLst>
               <a:ext uri="{FF2B5EF4-FFF2-40B4-BE49-F238E27FC236}">
-                <a16:creationId xmlns:a16="http://schemas.microsoft.com/office/drawing/2014/main" id="{AE29E238-8466-A3E8-7243-BDDDB4197445}"/>
+                <a16:creationId xmlns:a16="http://schemas.microsoft.com/office/drawing/2014/main" id="{CC5D26E6-8CDB-2507-2789-D8C6E4C8C78E}"/>
               </a:ext>
             </a:extLst>
           </p:cNvPr>
@@ -1268,7 +1268,7 @@
           <p:cNvPr id="3" name="内容占位符 2">
             <a:extLst>
               <a:ext uri="{FF2B5EF4-FFF2-40B4-BE49-F238E27FC236}">
-                <a16:creationId xmlns:a16="http://schemas.microsoft.com/office/drawing/2014/main" id="{0A023CA6-071D-D674-98B1-C125D6DF6E3D}"/>
+                <a16:creationId xmlns:a16="http://schemas.microsoft.com/office/drawing/2014/main" id="{63D258F1-3509-DDD9-659E-0AE2AA4E0FB9}"/>
               </a:ext>
             </a:extLst>
           </p:cNvPr>
@@ -1330,7 +1330,7 @@
           <p:cNvPr id="4" name="内容占位符 3">
             <a:extLst>
               <a:ext uri="{FF2B5EF4-FFF2-40B4-BE49-F238E27FC236}">
-                <a16:creationId xmlns:a16="http://schemas.microsoft.com/office/drawing/2014/main" id="{40E2C185-0BC3-C23B-AD2E-A22585CFCDF6}"/>
+                <a16:creationId xmlns:a16="http://schemas.microsoft.com/office/drawing/2014/main" id="{1E2CC814-79C6-7C61-8E8F-CC36CF5FDC26}"/>
               </a:ext>
             </a:extLst>
           </p:cNvPr>
@@ -1392,7 +1392,7 @@
           <p:cNvPr id="5" name="日期占位符 4">
             <a:extLst>
               <a:ext uri="{FF2B5EF4-FFF2-40B4-BE49-F238E27FC236}">
-                <a16:creationId xmlns:a16="http://schemas.microsoft.com/office/drawing/2014/main" id="{920BE3BE-3415-0C85-CBDE-E535BC423F61}"/>
+                <a16:creationId xmlns:a16="http://schemas.microsoft.com/office/drawing/2014/main" id="{8F8BCD0B-3515-0803-187D-3DE0B93E00F6}"/>
               </a:ext>
             </a:extLst>
           </p:cNvPr>
@@ -1408,7 +1408,7 @@
           <a:bodyPr/>
           <a:lstStyle/>
           <a:p>
-            <a:fld id="{243F0BD1-94EA-4D63-A2F5-5BFFEE810A19}" type="datetimeFigureOut">
+            <a:fld id="{E55F9051-2566-4200-B860-7E1F8C663F4B}" type="datetimeFigureOut">
               <a:rPr lang="zh-CN" altLang="en-US" smtClean="0"/>
               <a:t>2026/10/13</a:t>
             </a:fld>
@@ -1421,7 +1421,7 @@
           <p:cNvPr id="6" name="页脚占位符 5">
             <a:extLst>
               <a:ext uri="{FF2B5EF4-FFF2-40B4-BE49-F238E27FC236}">
-                <a16:creationId xmlns:a16="http://schemas.microsoft.com/office/drawing/2014/main" id="{9583E790-D902-1A2D-4178-D148B9904859}"/>
+                <a16:creationId xmlns:a16="http://schemas.microsoft.com/office/drawing/2014/main" id="{057F7B6F-39F2-8993-63A5-209A06149169}"/>
               </a:ext>
             </a:extLst>
           </p:cNvPr>
@@ -1446,7 +1446,7 @@
           <p:cNvPr id="7" name="灯片编号占位符 6">
             <a:extLst>
               <a:ext uri="{FF2B5EF4-FFF2-40B4-BE49-F238E27FC236}">
-                <a16:creationId xmlns:a16="http://schemas.microsoft.com/office/drawing/2014/main" id="{12D03380-2BBB-E372-7163-15AED146F8CC}"/>
+                <a16:creationId xmlns:a16="http://schemas.microsoft.com/office/drawing/2014/main" id="{029F42F3-BC88-59F3-1E93-2AC6AA1A848E}"/>
               </a:ext>
             </a:extLst>
           </p:cNvPr>
@@ -1462,7 +1462,7 @@
           <a:bodyPr/>
           <a:lstStyle/>
           <a:p>
-            <a:fld id="{6B9EDC62-10D3-457F-B9DD-3F915346C1FF}" type="slidenum">
+            <a:fld id="{8DFCF1E8-F400-4BDF-90B2-B82CEEA72621}" type="slidenum">
               <a:rPr lang="zh-CN" altLang="en-US" smtClean="0"/>
               <a:t>‹#›</a:t>
             </a:fld>
@@ -1473,7 +1473,7 @@
     </p:spTree>
     <p:extLst>
       <p:ext uri="{BB962C8B-B14F-4D97-AF65-F5344CB8AC3E}">
-        <p14:creationId xmlns:p14="http://schemas.microsoft.com/office/powerpoint/2010/main" val="3383343835"/>
+        <p14:creationId xmlns:p14="http://schemas.microsoft.com/office/powerpoint/2010/main" val="3720810552"/>
       </p:ext>
     </p:extLst>
   </p:cSld>
@@ -1505,7 +1505,7 @@
           <p:cNvPr id="2" name="标题 1">
             <a:extLst>
               <a:ext uri="{FF2B5EF4-FFF2-40B4-BE49-F238E27FC236}">
-                <a16:creationId xmlns:a16="http://schemas.microsoft.com/office/drawing/2014/main" id="{95355FEA-76BA-E01A-42AD-E712A20367E7}"/>
+                <a16:creationId xmlns:a16="http://schemas.microsoft.com/office/drawing/2014/main" id="{646EC3B9-4D62-4DA9-926D-645C16ACEBD9}"/>
               </a:ext>
             </a:extLst>
           </p:cNvPr>
@@ -1538,7 +1538,7 @@
           <p:cNvPr id="3" name="文本占位符 2">
             <a:extLst>
               <a:ext uri="{FF2B5EF4-FFF2-40B4-BE49-F238E27FC236}">
-                <a16:creationId xmlns:a16="http://schemas.microsoft.com/office/drawing/2014/main" id="{A5B6AAE3-96D7-9310-8B39-DCC1AF4B9ABD}"/>
+                <a16:creationId xmlns:a16="http://schemas.microsoft.com/office/drawing/2014/main" id="{2B152897-9463-42E2-E1C0-856B792FD045}"/>
               </a:ext>
             </a:extLst>
           </p:cNvPr>
@@ -1609,7 +1609,7 @@
           <p:cNvPr id="4" name="内容占位符 3">
             <a:extLst>
               <a:ext uri="{FF2B5EF4-FFF2-40B4-BE49-F238E27FC236}">
-                <a16:creationId xmlns:a16="http://schemas.microsoft.com/office/drawing/2014/main" id="{B1165644-D2FB-3DB4-4DBD-9C3B4656B57C}"/>
+                <a16:creationId xmlns:a16="http://schemas.microsoft.com/office/drawing/2014/main" id="{1B5133C7-75A6-AC8A-1654-70AD191A7554}"/>
               </a:ext>
             </a:extLst>
           </p:cNvPr>
@@ -1671,7 +1671,7 @@
           <p:cNvPr id="5" name="文本占位符 4">
             <a:extLst>
               <a:ext uri="{FF2B5EF4-FFF2-40B4-BE49-F238E27FC236}">
-                <a16:creationId xmlns:a16="http://schemas.microsoft.com/office/drawing/2014/main" id="{4558B88C-F73C-0C54-7857-175157BFDFAA}"/>
+                <a16:creationId xmlns:a16="http://schemas.microsoft.com/office/drawing/2014/main" id="{EE96EC4B-5444-A459-1726-2194E47A62DE}"/>
               </a:ext>
             </a:extLst>
           </p:cNvPr>
@@ -1742,7 +1742,7 @@
           <p:cNvPr id="6" name="内容占位符 5">
             <a:extLst>
               <a:ext uri="{FF2B5EF4-FFF2-40B4-BE49-F238E27FC236}">
-                <a16:creationId xmlns:a16="http://schemas.microsoft.com/office/drawing/2014/main" id="{83DA167D-32F3-A849-4467-C5414CB2EC74}"/>
+                <a16:creationId xmlns:a16="http://schemas.microsoft.com/office/drawing/2014/main" id="{3A34F738-0D49-D8E0-C7A8-A5EEF0B2672A}"/>
               </a:ext>
             </a:extLst>
           </p:cNvPr>
@@ -1804,7 +1804,7 @@
           <p:cNvPr id="7" name="日期占位符 6">
             <a:extLst>
               <a:ext uri="{FF2B5EF4-FFF2-40B4-BE49-F238E27FC236}">
-                <a16:creationId xmlns:a16="http://schemas.microsoft.com/office/drawing/2014/main" id="{334BE87D-6E2C-0354-F710-BF32ED3CF402}"/>
+                <a16:creationId xmlns:a16="http://schemas.microsoft.com/office/drawing/2014/main" id="{8A7495F4-F474-72EA-C20A-C41E5F3E9F0C}"/>
               </a:ext>
             </a:extLst>
           </p:cNvPr>
@@ -1820,7 +1820,7 @@
           <a:bodyPr/>
           <a:lstStyle/>
           <a:p>
-            <a:fld id="{243F0BD1-94EA-4D63-A2F5-5BFFEE810A19}" type="datetimeFigureOut">
+            <a:fld id="{E55F9051-2566-4200-B860-7E1F8C663F4B}" type="datetimeFigureOut">
               <a:rPr lang="zh-CN" altLang="en-US" smtClean="0"/>
               <a:t>2026/10/13</a:t>
             </a:fld>
@@ -1833,7 +1833,7 @@
           <p:cNvPr id="8" name="页脚占位符 7">
             <a:extLst>
               <a:ext uri="{FF2B5EF4-FFF2-40B4-BE49-F238E27FC236}">
-                <a16:creationId xmlns:a16="http://schemas.microsoft.com/office/drawing/2014/main" id="{912C2658-8AE5-65F4-70F5-9678BCCF7CE9}"/>
+                <a16:creationId xmlns:a16="http://schemas.microsoft.com/office/drawing/2014/main" id="{62973CE3-8A52-2C7B-90BA-5565C744B9D0}"/>
               </a:ext>
             </a:extLst>
           </p:cNvPr>
@@ -1858,7 +1858,7 @@
           <p:cNvPr id="9" name="灯片编号占位符 8">
             <a:extLst>
               <a:ext uri="{FF2B5EF4-FFF2-40B4-BE49-F238E27FC236}">
-                <a16:creationId xmlns:a16="http://schemas.microsoft.com/office/drawing/2014/main" id="{ABF61BAC-3AE3-90B2-B21A-6D8100C88098}"/>
+                <a16:creationId xmlns:a16="http://schemas.microsoft.com/office/drawing/2014/main" id="{9B66FCAC-4B9E-E01A-C6B6-FAA3CF8A0E6A}"/>
               </a:ext>
             </a:extLst>
           </p:cNvPr>
@@ -1874,7 +1874,7 @@
           <a:bodyPr/>
           <a:lstStyle/>
           <a:p>
-            <a:fld id="{6B9EDC62-10D3-457F-B9DD-3F915346C1FF}" type="slidenum">
+            <a:fld id="{8DFCF1E8-F400-4BDF-90B2-B82CEEA72621}" type="slidenum">
               <a:rPr lang="zh-CN" altLang="en-US" smtClean="0"/>
               <a:t>‹#›</a:t>
             </a:fld>
@@ -1885,7 +1885,7 @@
     </p:spTree>
     <p:extLst>
       <p:ext uri="{BB962C8B-B14F-4D97-AF65-F5344CB8AC3E}">
-        <p14:creationId xmlns:p14="http://schemas.microsoft.com/office/powerpoint/2010/main" val="2996884600"/>
+        <p14:creationId xmlns:p14="http://schemas.microsoft.com/office/powerpoint/2010/main" val="756471366"/>
       </p:ext>
     </p:extLst>
   </p:cSld>
@@ -1917,7 +1917,7 @@
           <p:cNvPr id="2" name="标题 1">
             <a:extLst>
               <a:ext uri="{FF2B5EF4-FFF2-40B4-BE49-F238E27FC236}">
-                <a16:creationId xmlns:a16="http://schemas.microsoft.com/office/drawing/2014/main" id="{1A1DF241-5049-22B4-7CC3-D7E54BB3CFFB}"/>
+                <a16:creationId xmlns:a16="http://schemas.microsoft.com/office/drawing/2014/main" id="{94D51DE6-19C8-E2FD-D88B-BB3D659074EC}"/>
               </a:ext>
             </a:extLst>
           </p:cNvPr>
@@ -1945,7 +1945,7 @@
           <p:cNvPr id="3" name="日期占位符 2">
             <a:extLst>
               <a:ext uri="{FF2B5EF4-FFF2-40B4-BE49-F238E27FC236}">
-                <a16:creationId xmlns:a16="http://schemas.microsoft.com/office/drawing/2014/main" id="{BA297D89-6A07-D108-34FB-D17FAE8D1BDA}"/>
+                <a16:creationId xmlns:a16="http://schemas.microsoft.com/office/drawing/2014/main" id="{E34FB20C-EE39-5113-1E0E-1887054240A3}"/>
               </a:ext>
             </a:extLst>
           </p:cNvPr>
@@ -1961,7 +1961,7 @@
           <a:bodyPr/>
           <a:lstStyle/>
           <a:p>
-            <a:fld id="{243F0BD1-94EA-4D63-A2F5-5BFFEE810A19}" type="datetimeFigureOut">
+            <a:fld id="{E55F9051-2566-4200-B860-7E1F8C663F4B}" type="datetimeFigureOut">
               <a:rPr lang="zh-CN" altLang="en-US" smtClean="0"/>
               <a:t>2026/10/13</a:t>
             </a:fld>
@@ -1974,7 +1974,7 @@
           <p:cNvPr id="4" name="页脚占位符 3">
             <a:extLst>
               <a:ext uri="{FF2B5EF4-FFF2-40B4-BE49-F238E27FC236}">
-                <a16:creationId xmlns:a16="http://schemas.microsoft.com/office/drawing/2014/main" id="{38D0BA92-ADD7-50C5-5F11-7A4C4AD721E1}"/>
+                <a16:creationId xmlns:a16="http://schemas.microsoft.com/office/drawing/2014/main" id="{E68F2428-70CE-EAB4-10F8-3292A985D752}"/>
               </a:ext>
             </a:extLst>
           </p:cNvPr>
@@ -1999,7 +1999,7 @@
           <p:cNvPr id="5" name="灯片编号占位符 4">
             <a:extLst>
               <a:ext uri="{FF2B5EF4-FFF2-40B4-BE49-F238E27FC236}">
-                <a16:creationId xmlns:a16="http://schemas.microsoft.com/office/drawing/2014/main" id="{BBCF6343-29EE-FDF6-DC55-B4EF74FE3DAA}"/>
+                <a16:creationId xmlns:a16="http://schemas.microsoft.com/office/drawing/2014/main" id="{728B3759-3532-F7FC-A78F-663833C16F8C}"/>
               </a:ext>
             </a:extLst>
           </p:cNvPr>
@@ -2015,7 +2015,7 @@
           <a:bodyPr/>
           <a:lstStyle/>
           <a:p>
-            <a:fld id="{6B9EDC62-10D3-457F-B9DD-3F915346C1FF}" type="slidenum">
+            <a:fld id="{8DFCF1E8-F400-4BDF-90B2-B82CEEA72621}" type="slidenum">
               <a:rPr lang="zh-CN" altLang="en-US" smtClean="0"/>
               <a:t>‹#›</a:t>
             </a:fld>
@@ -2026,7 +2026,7 @@
     </p:spTree>
     <p:extLst>
       <p:ext uri="{BB962C8B-B14F-4D97-AF65-F5344CB8AC3E}">
-        <p14:creationId xmlns:p14="http://schemas.microsoft.com/office/powerpoint/2010/main" val="3373363592"/>
+        <p14:creationId xmlns:p14="http://schemas.microsoft.com/office/powerpoint/2010/main" val="2681756504"/>
       </p:ext>
     </p:extLst>
   </p:cSld>
@@ -2058,7 +2058,7 @@
           <p:cNvPr id="2" name="日期占位符 1">
             <a:extLst>
               <a:ext uri="{FF2B5EF4-FFF2-40B4-BE49-F238E27FC236}">
-                <a16:creationId xmlns:a16="http://schemas.microsoft.com/office/drawing/2014/main" id="{98FE9FD7-FCA1-91BC-25A6-F75832CD76F9}"/>
+                <a16:creationId xmlns:a16="http://schemas.microsoft.com/office/drawing/2014/main" id="{B9CC33F3-71FA-5010-3B41-A908E103FFE4}"/>
               </a:ext>
             </a:extLst>
           </p:cNvPr>
@@ -2074,7 +2074,7 @@
           <a:bodyPr/>
           <a:lstStyle/>
           <a:p>
-            <a:fld id="{243F0BD1-94EA-4D63-A2F5-5BFFEE810A19}" type="datetimeFigureOut">
+            <a:fld id="{E55F9051-2566-4200-B860-7E1F8C663F4B}" type="datetimeFigureOut">
               <a:rPr lang="zh-CN" altLang="en-US" smtClean="0"/>
               <a:t>2026/10/13</a:t>
             </a:fld>
@@ -2087,7 +2087,7 @@
           <p:cNvPr id="3" name="页脚占位符 2">
             <a:extLst>
               <a:ext uri="{FF2B5EF4-FFF2-40B4-BE49-F238E27FC236}">
-                <a16:creationId xmlns:a16="http://schemas.microsoft.com/office/drawing/2014/main" id="{70122218-F31F-C936-2715-B31BA7F43348}"/>
+                <a16:creationId xmlns:a16="http://schemas.microsoft.com/office/drawing/2014/main" id="{9F4EC962-2910-C927-B01D-FA06316DE511}"/>
               </a:ext>
             </a:extLst>
           </p:cNvPr>
@@ -2112,7 +2112,7 @@
           <p:cNvPr id="4" name="灯片编号占位符 3">
             <a:extLst>
               <a:ext uri="{FF2B5EF4-FFF2-40B4-BE49-F238E27FC236}">
-                <a16:creationId xmlns:a16="http://schemas.microsoft.com/office/drawing/2014/main" id="{A551EB8B-7EE5-1287-79C0-EDB0DFF370BF}"/>
+                <a16:creationId xmlns:a16="http://schemas.microsoft.com/office/drawing/2014/main" id="{7C7612D2-9AE9-801E-984F-E767F544422F}"/>
               </a:ext>
             </a:extLst>
           </p:cNvPr>
@@ -2128,7 +2128,7 @@
           <a:bodyPr/>
           <a:lstStyle/>
           <a:p>
-            <a:fld id="{6B9EDC62-10D3-457F-B9DD-3F915346C1FF}" type="slidenum">
+            <a:fld id="{8DFCF1E8-F400-4BDF-90B2-B82CEEA72621}" type="slidenum">
               <a:rPr lang="zh-CN" altLang="en-US" smtClean="0"/>
               <a:t>‹#›</a:t>
             </a:fld>
@@ -2139,7 +2139,7 @@
     </p:spTree>
     <p:extLst>
       <p:ext uri="{BB962C8B-B14F-4D97-AF65-F5344CB8AC3E}">
-        <p14:creationId xmlns:p14="http://schemas.microsoft.com/office/powerpoint/2010/main" val="2112374293"/>
+        <p14:creationId xmlns:p14="http://schemas.microsoft.com/office/powerpoint/2010/main" val="2068663590"/>
       </p:ext>
     </p:extLst>
   </p:cSld>
@@ -2171,7 +2171,7 @@
           <p:cNvPr id="2" name="标题 1">
             <a:extLst>
               <a:ext uri="{FF2B5EF4-FFF2-40B4-BE49-F238E27FC236}">
-                <a16:creationId xmlns:a16="http://schemas.microsoft.com/office/drawing/2014/main" id="{B01C13EA-724B-BE19-FCE9-AC0FB01346EA}"/>
+                <a16:creationId xmlns:a16="http://schemas.microsoft.com/office/drawing/2014/main" id="{0A5D9160-FF45-01DF-0A60-16D156DFB1DC}"/>
               </a:ext>
             </a:extLst>
           </p:cNvPr>
@@ -2208,7 +2208,7 @@
           <p:cNvPr id="3" name="内容占位符 2">
             <a:extLst>
               <a:ext uri="{FF2B5EF4-FFF2-40B4-BE49-F238E27FC236}">
-                <a16:creationId xmlns:a16="http://schemas.microsoft.com/office/drawing/2014/main" id="{1A88D404-2F1C-AF53-F4A7-DEC5F44C8728}"/>
+                <a16:creationId xmlns:a16="http://schemas.microsoft.com/office/drawing/2014/main" id="{FBF6481A-D43D-2CDC-FADF-E991EB8E6B54}"/>
               </a:ext>
             </a:extLst>
           </p:cNvPr>
@@ -2298,7 +2298,7 @@
           <p:cNvPr id="4" name="文本占位符 3">
             <a:extLst>
               <a:ext uri="{FF2B5EF4-FFF2-40B4-BE49-F238E27FC236}">
-                <a16:creationId xmlns:a16="http://schemas.microsoft.com/office/drawing/2014/main" id="{BD1CC0AD-DCB0-F087-8836-E2E7D1C62859}"/>
+                <a16:creationId xmlns:a16="http://schemas.microsoft.com/office/drawing/2014/main" id="{05D89B65-DAEE-A6CF-B52D-3CB923E45993}"/>
               </a:ext>
             </a:extLst>
           </p:cNvPr>
@@ -2369,7 +2369,7 @@
           <p:cNvPr id="5" name="日期占位符 4">
             <a:extLst>
               <a:ext uri="{FF2B5EF4-FFF2-40B4-BE49-F238E27FC236}">
-                <a16:creationId xmlns:a16="http://schemas.microsoft.com/office/drawing/2014/main" id="{A12A1F63-4FD0-EF36-5260-93A06EC313AD}"/>
+                <a16:creationId xmlns:a16="http://schemas.microsoft.com/office/drawing/2014/main" id="{12C2B605-5B3D-57A7-6DC8-80907CF55ED4}"/>
               </a:ext>
             </a:extLst>
           </p:cNvPr>
@@ -2385,7 +2385,7 @@
           <a:bodyPr/>
           <a:lstStyle/>
           <a:p>
-            <a:fld id="{243F0BD1-94EA-4D63-A2F5-5BFFEE810A19}" type="datetimeFigureOut">
+            <a:fld id="{E55F9051-2566-4200-B860-7E1F8C663F4B}" type="datetimeFigureOut">
               <a:rPr lang="zh-CN" altLang="en-US" smtClean="0"/>
               <a:t>2026/10/13</a:t>
             </a:fld>
@@ -2398,7 +2398,7 @@
           <p:cNvPr id="6" name="页脚占位符 5">
             <a:extLst>
               <a:ext uri="{FF2B5EF4-FFF2-40B4-BE49-F238E27FC236}">
-                <a16:creationId xmlns:a16="http://schemas.microsoft.com/office/drawing/2014/main" id="{E6237C6C-355A-56D1-F2ED-CE3A06EC6CD8}"/>
+                <a16:creationId xmlns:a16="http://schemas.microsoft.com/office/drawing/2014/main" id="{17A1B77C-B91F-F5A1-29CE-7DBEBB6D4E24}"/>
               </a:ext>
             </a:extLst>
           </p:cNvPr>
@@ -2423,7 +2423,7 @@
           <p:cNvPr id="7" name="灯片编号占位符 6">
             <a:extLst>
               <a:ext uri="{FF2B5EF4-FFF2-40B4-BE49-F238E27FC236}">
-                <a16:creationId xmlns:a16="http://schemas.microsoft.com/office/drawing/2014/main" id="{B64C2B9E-11BB-1DCF-56B0-B7270DD4B717}"/>
+                <a16:creationId xmlns:a16="http://schemas.microsoft.com/office/drawing/2014/main" id="{A493619F-4B12-ADC3-EB8D-0DC5ED01FC81}"/>
               </a:ext>
             </a:extLst>
           </p:cNvPr>
@@ -2439,7 +2439,7 @@
           <a:bodyPr/>
           <a:lstStyle/>
           <a:p>
-            <a:fld id="{6B9EDC62-10D3-457F-B9DD-3F915346C1FF}" type="slidenum">
+            <a:fld id="{8DFCF1E8-F400-4BDF-90B2-B82CEEA72621}" type="slidenum">
               <a:rPr lang="zh-CN" altLang="en-US" smtClean="0"/>
               <a:t>‹#›</a:t>
             </a:fld>
@@ -2450,7 +2450,7 @@
     </p:spTree>
     <p:extLst>
       <p:ext uri="{BB962C8B-B14F-4D97-AF65-F5344CB8AC3E}">
-        <p14:creationId xmlns:p14="http://schemas.microsoft.com/office/powerpoint/2010/main" val="2782280585"/>
+        <p14:creationId xmlns:p14="http://schemas.microsoft.com/office/powerpoint/2010/main" val="3190516523"/>
       </p:ext>
     </p:extLst>
   </p:cSld>
@@ -2482,7 +2482,7 @@
           <p:cNvPr id="2" name="标题 1">
             <a:extLst>
               <a:ext uri="{FF2B5EF4-FFF2-40B4-BE49-F238E27FC236}">
-                <a16:creationId xmlns:a16="http://schemas.microsoft.com/office/drawing/2014/main" id="{3BFD1C2C-D9EB-548B-4FF6-F54DEB87A1CB}"/>
+                <a16:creationId xmlns:a16="http://schemas.microsoft.com/office/drawing/2014/main" id="{098BF5A7-C4AF-7230-F2FA-C5A28E81F799}"/>
               </a:ext>
             </a:extLst>
           </p:cNvPr>
@@ -2519,7 +2519,7 @@
           <p:cNvPr id="3" name="图片占位符 2">
             <a:extLst>
               <a:ext uri="{FF2B5EF4-FFF2-40B4-BE49-F238E27FC236}">
-                <a16:creationId xmlns:a16="http://schemas.microsoft.com/office/drawing/2014/main" id="{BE7EBE02-0F79-ABF7-8804-3DF804192049}"/>
+                <a16:creationId xmlns:a16="http://schemas.microsoft.com/office/drawing/2014/main" id="{F3DA48D1-5295-D91A-2C76-60E8E117F4EC}"/>
               </a:ext>
             </a:extLst>
           </p:cNvPr>
@@ -2586,7 +2586,7 @@
           <p:cNvPr id="4" name="文本占位符 3">
             <a:extLst>
               <a:ext uri="{FF2B5EF4-FFF2-40B4-BE49-F238E27FC236}">
-                <a16:creationId xmlns:a16="http://schemas.microsoft.com/office/drawing/2014/main" id="{E9E4E1D9-D7BF-12BB-7CA6-364350D7C260}"/>
+                <a16:creationId xmlns:a16="http://schemas.microsoft.com/office/drawing/2014/main" id="{3FE38594-7FF5-4BA3-507B-35985F247D38}"/>
               </a:ext>
             </a:extLst>
           </p:cNvPr>
@@ -2657,7 +2657,7 @@
           <p:cNvPr id="5" name="日期占位符 4">
             <a:extLst>
               <a:ext uri="{FF2B5EF4-FFF2-40B4-BE49-F238E27FC236}">
-                <a16:creationId xmlns:a16="http://schemas.microsoft.com/office/drawing/2014/main" id="{649CADC0-14DF-8FCC-8D3B-9270C5EB3971}"/>
+                <a16:creationId xmlns:a16="http://schemas.microsoft.com/office/drawing/2014/main" id="{8745E9EF-6C75-EFC6-38E5-A69526A2F252}"/>
               </a:ext>
             </a:extLst>
           </p:cNvPr>
@@ -2673,7 +2673,7 @@
           <a:bodyPr/>
           <a:lstStyle/>
           <a:p>
-            <a:fld id="{243F0BD1-94EA-4D63-A2F5-5BFFEE810A19}" type="datetimeFigureOut">
+            <a:fld id="{E55F9051-2566-4200-B860-7E1F8C663F4B}" type="datetimeFigureOut">
               <a:rPr lang="zh-CN" altLang="en-US" smtClean="0"/>
               <a:t>2026/10/13</a:t>
             </a:fld>
@@ -2686,7 +2686,7 @@
           <p:cNvPr id="6" name="页脚占位符 5">
             <a:extLst>
               <a:ext uri="{FF2B5EF4-FFF2-40B4-BE49-F238E27FC236}">
-                <a16:creationId xmlns:a16="http://schemas.microsoft.com/office/drawing/2014/main" id="{850058C6-0097-B7E3-7E88-C0394538FDE0}"/>
+                <a16:creationId xmlns:a16="http://schemas.microsoft.com/office/drawing/2014/main" id="{6DAE6E36-7748-EA6F-CC83-63673A6F70C7}"/>
               </a:ext>
             </a:extLst>
           </p:cNvPr>
@@ -2711,7 +2711,7 @@
           <p:cNvPr id="7" name="灯片编号占位符 6">
             <a:extLst>
               <a:ext uri="{FF2B5EF4-FFF2-40B4-BE49-F238E27FC236}">
-                <a16:creationId xmlns:a16="http://schemas.microsoft.com/office/drawing/2014/main" id="{C97C2D64-43C9-C720-D30A-DF6AE30054A0}"/>
+                <a16:creationId xmlns:a16="http://schemas.microsoft.com/office/drawing/2014/main" id="{6E438FD7-34CD-D5FE-88FD-69E6EA244E4F}"/>
               </a:ext>
             </a:extLst>
           </p:cNvPr>
@@ -2727,7 +2727,7 @@
           <a:bodyPr/>
           <a:lstStyle/>
           <a:p>
-            <a:fld id="{6B9EDC62-10D3-457F-B9DD-3F915346C1FF}" type="slidenum">
+            <a:fld id="{8DFCF1E8-F400-4BDF-90B2-B82CEEA72621}" type="slidenum">
               <a:rPr lang="zh-CN" altLang="en-US" smtClean="0"/>
               <a:t>‹#›</a:t>
             </a:fld>
@@ -2738,7 +2738,7 @@
     </p:spTree>
     <p:extLst>
       <p:ext uri="{BB962C8B-B14F-4D97-AF65-F5344CB8AC3E}">
-        <p14:creationId xmlns:p14="http://schemas.microsoft.com/office/powerpoint/2010/main" val="3485309293"/>
+        <p14:creationId xmlns:p14="http://schemas.microsoft.com/office/powerpoint/2010/main" val="1625702677"/>
       </p:ext>
     </p:extLst>
   </p:cSld>
@@ -2775,7 +2775,7 @@
           <p:cNvPr id="2" name="标题占位符 1">
             <a:extLst>
               <a:ext uri="{FF2B5EF4-FFF2-40B4-BE49-F238E27FC236}">
-                <a16:creationId xmlns:a16="http://schemas.microsoft.com/office/drawing/2014/main" id="{E28C54FA-39B3-BDDE-6B17-88086A25411E}"/>
+                <a16:creationId xmlns:a16="http://schemas.microsoft.com/office/drawing/2014/main" id="{FCB74E88-B0FF-A975-312D-09B9E829EBBC}"/>
               </a:ext>
             </a:extLst>
           </p:cNvPr>
@@ -2813,7 +2813,7 @@
           <p:cNvPr id="3" name="文本占位符 2">
             <a:extLst>
               <a:ext uri="{FF2B5EF4-FFF2-40B4-BE49-F238E27FC236}">
-                <a16:creationId xmlns:a16="http://schemas.microsoft.com/office/drawing/2014/main" id="{2BFB701A-45E2-294F-7EC1-8905AC778B28}"/>
+                <a16:creationId xmlns:a16="http://schemas.microsoft.com/office/drawing/2014/main" id="{8E755362-83F3-1623-AAD4-16544EB7F4B0}"/>
               </a:ext>
             </a:extLst>
           </p:cNvPr>
@@ -2880,7 +2880,7 @@
           <p:cNvPr id="4" name="日期占位符 3">
             <a:extLst>
               <a:ext uri="{FF2B5EF4-FFF2-40B4-BE49-F238E27FC236}">
-                <a16:creationId xmlns:a16="http://schemas.microsoft.com/office/drawing/2014/main" id="{F7AF615D-D0B9-F28B-447A-264D5C283727}"/>
+                <a16:creationId xmlns:a16="http://schemas.microsoft.com/office/drawing/2014/main" id="{D211DB55-11CB-1454-1B4C-8CAF29581370}"/>
               </a:ext>
             </a:extLst>
           </p:cNvPr>
@@ -2914,7 +2914,7 @@
             </a:lvl1pPr>
           </a:lstStyle>
           <a:p>
-            <a:fld id="{243F0BD1-94EA-4D63-A2F5-5BFFEE810A19}" type="datetimeFigureOut">
+            <a:fld id="{E55F9051-2566-4200-B860-7E1F8C663F4B}" type="datetimeFigureOut">
               <a:rPr lang="zh-CN" altLang="en-US" smtClean="0"/>
               <a:t>2026/10/13</a:t>
             </a:fld>
@@ -2927,7 +2927,7 @@
           <p:cNvPr id="5" name="页脚占位符 4">
             <a:extLst>
               <a:ext uri="{FF2B5EF4-FFF2-40B4-BE49-F238E27FC236}">
-                <a16:creationId xmlns:a16="http://schemas.microsoft.com/office/drawing/2014/main" id="{A06E695A-1918-3CAE-737F-66C1B8A8CC6B}"/>
+                <a16:creationId xmlns:a16="http://schemas.microsoft.com/office/drawing/2014/main" id="{BF176488-DA19-B5E9-4010-950DB45E1A27}"/>
               </a:ext>
             </a:extLst>
           </p:cNvPr>
@@ -2970,7 +2970,7 @@
           <p:cNvPr id="6" name="灯片编号占位符 5">
             <a:extLst>
               <a:ext uri="{FF2B5EF4-FFF2-40B4-BE49-F238E27FC236}">
-                <a16:creationId xmlns:a16="http://schemas.microsoft.com/office/drawing/2014/main" id="{5EF732B7-3333-1BBA-A30B-3E795AB784C9}"/>
+                <a16:creationId xmlns:a16="http://schemas.microsoft.com/office/drawing/2014/main" id="{DB6D815B-5A2A-1F0E-B2F4-AA785B8B7DF5}"/>
               </a:ext>
             </a:extLst>
           </p:cNvPr>
@@ -3004,7 +3004,7 @@
             </a:lvl1pPr>
           </a:lstStyle>
           <a:p>
-            <a:fld id="{6B9EDC62-10D3-457F-B9DD-3F915346C1FF}" type="slidenum">
+            <a:fld id="{8DFCF1E8-F400-4BDF-90B2-B82CEEA72621}" type="slidenum">
               <a:rPr lang="zh-CN" altLang="en-US" smtClean="0"/>
               <a:t>‹#›</a:t>
             </a:fld>
@@ -3015,7 +3015,7 @@
     </p:spTree>
     <p:extLst>
       <p:ext uri="{BB962C8B-B14F-4D97-AF65-F5344CB8AC3E}">
-        <p14:creationId xmlns:p14="http://schemas.microsoft.com/office/powerpoint/2010/main" val="922273596"/>
+        <p14:creationId xmlns:p14="http://schemas.microsoft.com/office/powerpoint/2010/main" val="2264507715"/>
       </p:ext>
     </p:extLst>
   </p:cSld>
@@ -3346,7 +3346,7 @@
           <p:cNvPr id="2" name="文本框 1">
             <a:extLst>
               <a:ext uri="{FF2B5EF4-FFF2-40B4-BE49-F238E27FC236}">
-                <a16:creationId xmlns:a16="http://schemas.microsoft.com/office/drawing/2014/main" id="{372BC937-F861-B9BF-DA03-8F7F0BA4528F}"/>
+                <a16:creationId xmlns:a16="http://schemas.microsoft.com/office/drawing/2014/main" id="{C75467DD-0849-8028-8E16-A4A9058D19A7}"/>
               </a:ext>
             </a:extLst>
           </p:cNvPr>
@@ -3399,7 +3399,7 @@
     </p:spTree>
     <p:extLst>
       <p:ext uri="{BB962C8B-B14F-4D97-AF65-F5344CB8AC3E}">
-        <p14:creationId xmlns:p14="http://schemas.microsoft.com/office/powerpoint/2010/main" val="812430114"/>
+        <p14:creationId xmlns:p14="http://schemas.microsoft.com/office/powerpoint/2010/main" val="3107625464"/>
       </p:ext>
     </p:extLst>
   </p:cSld>
@@ -3451,7 +3451,7 @@
           <p:cNvPr id="2" name="文本框 1">
             <a:extLst>
               <a:ext uri="{FF2B5EF4-FFF2-40B4-BE49-F238E27FC236}">
-                <a16:creationId xmlns:a16="http://schemas.microsoft.com/office/drawing/2014/main" id="{CD56692D-9371-922D-9B7C-4C5233EAB50F}"/>
+                <a16:creationId xmlns:a16="http://schemas.microsoft.com/office/drawing/2014/main" id="{FF84514F-1AE8-1A22-C203-FFCE229B2627}"/>
               </a:ext>
             </a:extLst>
           </p:cNvPr>
@@ -3504,7 +3504,7 @@
     </p:spTree>
     <p:extLst>
       <p:ext uri="{BB962C8B-B14F-4D97-AF65-F5344CB8AC3E}">
-        <p14:creationId xmlns:p14="http://schemas.microsoft.com/office/powerpoint/2010/main" val="4019880949"/>
+        <p14:creationId xmlns:p14="http://schemas.microsoft.com/office/powerpoint/2010/main" val="3155724719"/>
       </p:ext>
     </p:extLst>
   </p:cSld>
@@ -3556,7 +3556,7 @@
           <p:cNvPr id="2" name="文本框 1">
             <a:extLst>
               <a:ext uri="{FF2B5EF4-FFF2-40B4-BE49-F238E27FC236}">
-                <a16:creationId xmlns:a16="http://schemas.microsoft.com/office/drawing/2014/main" id="{AD0C58E9-6423-9247-546F-AD56DFA3A16C}"/>
+                <a16:creationId xmlns:a16="http://schemas.microsoft.com/office/drawing/2014/main" id="{7B66B26B-0EC6-4BF2-29F9-5BA55B663054}"/>
               </a:ext>
             </a:extLst>
           </p:cNvPr>
@@ -3609,7 +3609,7 @@
     </p:spTree>
     <p:extLst>
       <p:ext uri="{BB962C8B-B14F-4D97-AF65-F5344CB8AC3E}">
-        <p14:creationId xmlns:p14="http://schemas.microsoft.com/office/powerpoint/2010/main" val="46759310"/>
+        <p14:creationId xmlns:p14="http://schemas.microsoft.com/office/powerpoint/2010/main" val="1286680207"/>
       </p:ext>
     </p:extLst>
   </p:cSld>
@@ -3661,7 +3661,7 @@
           <p:cNvPr id="2" name="文本框 1">
             <a:extLst>
               <a:ext uri="{FF2B5EF4-FFF2-40B4-BE49-F238E27FC236}">
-                <a16:creationId xmlns:a16="http://schemas.microsoft.com/office/drawing/2014/main" id="{D3E48304-FBE6-07BE-5856-F6B8997E55A6}"/>
+                <a16:creationId xmlns:a16="http://schemas.microsoft.com/office/drawing/2014/main" id="{11A4A224-5E1B-417F-0BA3-5DD3C4AAC90E}"/>
               </a:ext>
             </a:extLst>
           </p:cNvPr>
@@ -3714,7 +3714,7 @@
     </p:spTree>
     <p:extLst>
       <p:ext uri="{BB962C8B-B14F-4D97-AF65-F5344CB8AC3E}">
-        <p14:creationId xmlns:p14="http://schemas.microsoft.com/office/powerpoint/2010/main" val="1735671025"/>
+        <p14:creationId xmlns:p14="http://schemas.microsoft.com/office/powerpoint/2010/main" val="2515917738"/>
       </p:ext>
     </p:extLst>
   </p:cSld>
@@ -3766,7 +3766,7 @@
           <p:cNvPr id="2" name="文本框 1">
             <a:extLst>
               <a:ext uri="{FF2B5EF4-FFF2-40B4-BE49-F238E27FC236}">
-                <a16:creationId xmlns:a16="http://schemas.microsoft.com/office/drawing/2014/main" id="{80354D59-E932-6A04-F255-0047A12F189E}"/>
+                <a16:creationId xmlns:a16="http://schemas.microsoft.com/office/drawing/2014/main" id="{C435E8D6-515E-167B-A20D-BC7E4AE59BD5}"/>
               </a:ext>
             </a:extLst>
           </p:cNvPr>
@@ -3819,7 +3819,7 @@
     </p:spTree>
     <p:extLst>
       <p:ext uri="{BB962C8B-B14F-4D97-AF65-F5344CB8AC3E}">
-        <p14:creationId xmlns:p14="http://schemas.microsoft.com/office/powerpoint/2010/main" val="1082345543"/>
+        <p14:creationId xmlns:p14="http://schemas.microsoft.com/office/powerpoint/2010/main" val="3814365747"/>
       </p:ext>
     </p:extLst>
   </p:cSld>
@@ -3871,7 +3871,7 @@
           <p:cNvPr id="2" name="文本框 1">
             <a:extLst>
               <a:ext uri="{FF2B5EF4-FFF2-40B4-BE49-F238E27FC236}">
-                <a16:creationId xmlns:a16="http://schemas.microsoft.com/office/drawing/2014/main" id="{A5060B4C-DE0B-1689-1747-39E45B3F8977}"/>
+                <a16:creationId xmlns:a16="http://schemas.microsoft.com/office/drawing/2014/main" id="{CAC1FD99-9DEC-66D0-428F-7DD50BF866FA}"/>
               </a:ext>
             </a:extLst>
           </p:cNvPr>
@@ -3924,7 +3924,7 @@
     </p:spTree>
     <p:extLst>
       <p:ext uri="{BB962C8B-B14F-4D97-AF65-F5344CB8AC3E}">
-        <p14:creationId xmlns:p14="http://schemas.microsoft.com/office/powerpoint/2010/main" val="2036821765"/>
+        <p14:creationId xmlns:p14="http://schemas.microsoft.com/office/powerpoint/2010/main" val="3093233175"/>
       </p:ext>
     </p:extLst>
   </p:cSld>
@@ -3976,7 +3976,7 @@
           <p:cNvPr id="2" name="文本框 1">
             <a:extLst>
               <a:ext uri="{FF2B5EF4-FFF2-40B4-BE49-F238E27FC236}">
-                <a16:creationId xmlns:a16="http://schemas.microsoft.com/office/drawing/2014/main" id="{2A90256F-D3AE-EDB6-D97B-C380E551443F}"/>
+                <a16:creationId xmlns:a16="http://schemas.microsoft.com/office/drawing/2014/main" id="{772B0F15-635E-DE20-C6B4-D2F80DEE93E4}"/>
               </a:ext>
             </a:extLst>
           </p:cNvPr>
@@ -4029,7 +4029,7 @@
     </p:spTree>
     <p:extLst>
       <p:ext uri="{BB962C8B-B14F-4D97-AF65-F5344CB8AC3E}">
-        <p14:creationId xmlns:p14="http://schemas.microsoft.com/office/powerpoint/2010/main" val="2500475713"/>
+        <p14:creationId xmlns:p14="http://schemas.microsoft.com/office/powerpoint/2010/main" val="1466634030"/>
       </p:ext>
     </p:extLst>
   </p:cSld>
@@ -4081,7 +4081,7 @@
           <p:cNvPr id="2" name="文本框 1">
             <a:extLst>
               <a:ext uri="{FF2B5EF4-FFF2-40B4-BE49-F238E27FC236}">
-                <a16:creationId xmlns:a16="http://schemas.microsoft.com/office/drawing/2014/main" id="{38FC9ABB-E1D6-51B4-18F5-59B497EAE1A0}"/>
+                <a16:creationId xmlns:a16="http://schemas.microsoft.com/office/drawing/2014/main" id="{B9E67326-B4CF-B43C-780E-0A06840853E5}"/>
               </a:ext>
             </a:extLst>
           </p:cNvPr>
@@ -4134,7 +4134,7 @@
     </p:spTree>
     <p:extLst>
       <p:ext uri="{BB962C8B-B14F-4D97-AF65-F5344CB8AC3E}">
-        <p14:creationId xmlns:p14="http://schemas.microsoft.com/office/powerpoint/2010/main" val="2685374424"/>
+        <p14:creationId xmlns:p14="http://schemas.microsoft.com/office/powerpoint/2010/main" val="3828040335"/>
       </p:ext>
     </p:extLst>
   </p:cSld>
@@ -4186,7 +4186,7 @@
           <p:cNvPr id="2" name="文本框 1">
             <a:extLst>
               <a:ext uri="{FF2B5EF4-FFF2-40B4-BE49-F238E27FC236}">
-                <a16:creationId xmlns:a16="http://schemas.microsoft.com/office/drawing/2014/main" id="{3C042B0D-0AAF-6DE8-FC63-F7527A7BE46D}"/>
+                <a16:creationId xmlns:a16="http://schemas.microsoft.com/office/drawing/2014/main" id="{D4EAC87B-19A5-5534-A8EE-583593059329}"/>
               </a:ext>
             </a:extLst>
           </p:cNvPr>
@@ -4239,7 +4239,7 @@
     </p:spTree>
     <p:extLst>
       <p:ext uri="{BB962C8B-B14F-4D97-AF65-F5344CB8AC3E}">
-        <p14:creationId xmlns:p14="http://schemas.microsoft.com/office/powerpoint/2010/main" val="2770394571"/>
+        <p14:creationId xmlns:p14="http://schemas.microsoft.com/office/powerpoint/2010/main" val="3312264767"/>
       </p:ext>
     </p:extLst>
   </p:cSld>
@@ -4291,7 +4291,7 @@
           <p:cNvPr id="2" name="文本框 1">
             <a:extLst>
               <a:ext uri="{FF2B5EF4-FFF2-40B4-BE49-F238E27FC236}">
-                <a16:creationId xmlns:a16="http://schemas.microsoft.com/office/drawing/2014/main" id="{CA5EF1F5-9E07-FE1D-F8F6-5FB6D1509064}"/>
+                <a16:creationId xmlns:a16="http://schemas.microsoft.com/office/drawing/2014/main" id="{98A94750-10B5-88D5-DA26-222CCEFC6B52}"/>
               </a:ext>
             </a:extLst>
           </p:cNvPr>
@@ -4344,7 +4344,7 @@
     </p:spTree>
     <p:extLst>
       <p:ext uri="{BB962C8B-B14F-4D97-AF65-F5344CB8AC3E}">
-        <p14:creationId xmlns:p14="http://schemas.microsoft.com/office/powerpoint/2010/main" val="3906023687"/>
+        <p14:creationId xmlns:p14="http://schemas.microsoft.com/office/powerpoint/2010/main" val="2111003578"/>
       </p:ext>
     </p:extLst>
   </p:cSld>
@@ -4396,7 +4396,7 @@
           <p:cNvPr id="2" name="文本框 1">
             <a:extLst>
               <a:ext uri="{FF2B5EF4-FFF2-40B4-BE49-F238E27FC236}">
-                <a16:creationId xmlns:a16="http://schemas.microsoft.com/office/drawing/2014/main" id="{B8C44638-275D-0920-296A-46DF2D0E910B}"/>
+                <a16:creationId xmlns:a16="http://schemas.microsoft.com/office/drawing/2014/main" id="{7AEAC3AD-B398-FAEC-25EC-BF8CDA27A2B4}"/>
               </a:ext>
             </a:extLst>
           </p:cNvPr>
@@ -4449,7 +4449,7 @@
     </p:spTree>
     <p:extLst>
       <p:ext uri="{BB962C8B-B14F-4D97-AF65-F5344CB8AC3E}">
-        <p14:creationId xmlns:p14="http://schemas.microsoft.com/office/powerpoint/2010/main" val="661489246"/>
+        <p14:creationId xmlns:p14="http://schemas.microsoft.com/office/powerpoint/2010/main" val="3351592570"/>
       </p:ext>
     </p:extLst>
   </p:cSld>
@@ -4501,7 +4501,7 @@
           <p:cNvPr id="2" name="文本框 1">
             <a:extLst>
               <a:ext uri="{FF2B5EF4-FFF2-40B4-BE49-F238E27FC236}">
-                <a16:creationId xmlns:a16="http://schemas.microsoft.com/office/drawing/2014/main" id="{ACF6CB37-C96D-95C9-19A4-13704ACA9F67}"/>
+                <a16:creationId xmlns:a16="http://schemas.microsoft.com/office/drawing/2014/main" id="{FCAE6CB8-74EB-CA7B-D472-28D9C75AB9A1}"/>
               </a:ext>
             </a:extLst>
           </p:cNvPr>
@@ -4554,7 +4554,7 @@
     </p:spTree>
     <p:extLst>
       <p:ext uri="{BB962C8B-B14F-4D97-AF65-F5344CB8AC3E}">
-        <p14:creationId xmlns:p14="http://schemas.microsoft.com/office/powerpoint/2010/main" val="226864827"/>
+        <p14:creationId xmlns:p14="http://schemas.microsoft.com/office/powerpoint/2010/main" val="4064164179"/>
       </p:ext>
     </p:extLst>
   </p:cSld>
@@ -4606,7 +4606,7 @@
           <p:cNvPr id="2" name="文本框 1">
             <a:extLst>
               <a:ext uri="{FF2B5EF4-FFF2-40B4-BE49-F238E27FC236}">
-                <a16:creationId xmlns:a16="http://schemas.microsoft.com/office/drawing/2014/main" id="{EAAC7176-51F8-3515-167E-C73D38895FCF}"/>
+                <a16:creationId xmlns:a16="http://schemas.microsoft.com/office/drawing/2014/main" id="{49FE965A-8C9C-1DFE-F60B-D662391C77B8}"/>
               </a:ext>
             </a:extLst>
           </p:cNvPr>
@@ -4659,13 +4659,25 @@
     </p:spTree>
     <p:extLst>
       <p:ext uri="{BB962C8B-B14F-4D97-AF65-F5344CB8AC3E}">
-        <p14:creationId xmlns:p14="http://schemas.microsoft.com/office/powerpoint/2010/main" val="2145276317"/>
+        <p14:creationId xmlns:p14="http://schemas.microsoft.com/office/powerpoint/2010/main" val="341205928"/>
       </p:ext>
     </p:extLst>
   </p:cSld>
   <p:clrMapOvr>
     <a:masterClrMapping/>
   </p:clrMapOvr>
+  <mc:AlternateContent xmlns:mc="http://schemas.openxmlformats.org/markup-compatibility/2006">
+    <mc:Choice xmlns:p14="http://schemas.microsoft.com/office/powerpoint/2010/main" Requires="p14">
+      <p:transition spd="slow" p14:dur="2000">
+        <p:split orient="vert"/>
+      </p:transition>
+    </mc:Choice>
+    <mc:Fallback>
+      <p:transition spd="slow">
+        <p:split orient="vert"/>
+      </p:transition>
+    </mc:Fallback>
+  </mc:AlternateContent>
 </p:sld>
 </file>
 
